--- a/_documentation/Earthquake_Monitor_Presentation.pptx
+++ b/_documentation/Earthquake_Monitor_Presentation.pptx
@@ -7029,7 +7029,7 @@
         <p:spPr>
           <a:xfrm>
             <a:off x="457200" y="2057400"/>
-            <a:ext cx="3291840" cy="484632"/>
+            <a:ext cx="3291840" cy="492443"/>
           </a:xfrm>
           <a:prstGeom prst="rect">
             <a:avLst/>
@@ -7044,46 +7044,68 @@
           <a:p>
             <a:pPr algn="l"/>
             <a:r>
-              <a:rPr sz="1300" b="0">
+              <a:rPr sz="1300" b="0" dirty="0">
                 <a:solidFill>
                   <a:srgbClr val="E0E0E0"/>
                 </a:solidFill>
               </a:rPr>
-              <a:t>• Apache Kafka (Confluent CP 7.5.3)</a:t>
-            </a:r>
-          </a:p>
-        </p:txBody>
-      </p:sp>
-      <p:sp>
-        <p:nvSpPr>
-          <p:cNvPr id="11" name="TextBox 10"/>
-          <p:cNvSpPr txBox="1"/>
-          <p:nvPr/>
-        </p:nvSpPr>
-        <p:spPr>
-          <a:xfrm>
-            <a:off x="457200" y="2578608"/>
-            <a:ext cx="3291840" cy="484632"/>
-          </a:xfrm>
-          <a:prstGeom prst="rect">
-            <a:avLst/>
-          </a:prstGeom>
-          <a:noFill/>
-        </p:spPr>
-        <p:txBody>
-          <a:bodyPr wrap="square">
-            <a:spAutoFit/>
-          </a:bodyPr>
-          <a:lstStyle/>
-          <a:p>
-            <a:pPr algn="l"/>
-            <a:r>
-              <a:rPr sz="1300" b="0">
+              <a:t>• Apache Kafka (</a:t>
+            </a:r>
+            <a:r>
+              <a:rPr lang="de-CH" sz="1300" b="0" dirty="0">
                 <a:solidFill>
                   <a:srgbClr val="E0E0E0"/>
                 </a:solidFill>
               </a:rPr>
-              <a:t>• Zookeeper (cluster coordination)</a:t>
+              <a:t>Communication </a:t>
+            </a:r>
+            <a:r>
+              <a:rPr lang="de-CH" sz="1300" b="0" dirty="0" err="1">
+                <a:solidFill>
+                  <a:srgbClr val="E0E0E0"/>
+                </a:solidFill>
+              </a:rPr>
+              <a:t>between</a:t>
+            </a:r>
+            <a:r>
+              <a:rPr lang="de-CH" sz="1300" b="0" dirty="0">
+                <a:solidFill>
+                  <a:srgbClr val="E0E0E0"/>
+                </a:solidFill>
+              </a:rPr>
+              <a:t> </a:t>
+            </a:r>
+            <a:r>
+              <a:rPr lang="de-CH" sz="1300" b="0" dirty="0" err="1">
+                <a:solidFill>
+                  <a:srgbClr val="E0E0E0"/>
+                </a:solidFill>
+              </a:rPr>
+              <a:t>the</a:t>
+            </a:r>
+            <a:r>
+              <a:rPr lang="de-CH" sz="1300" b="0" dirty="0">
+                <a:solidFill>
+                  <a:srgbClr val="E0E0E0"/>
+                </a:solidFill>
+              </a:rPr>
+              <a:t> </a:t>
+            </a:r>
+            <a:r>
+              <a:rPr lang="de-CH" sz="1300" b="0" dirty="0" err="1">
+                <a:solidFill>
+                  <a:srgbClr val="E0E0E0"/>
+                </a:solidFill>
+              </a:rPr>
+              <a:t>layers</a:t>
+            </a:r>
+            <a:r>
+              <a:rPr sz="1300" b="0" dirty="0">
+                <a:solidFill>
+                  <a:srgbClr val="E0E0E0"/>
+                </a:solidFill>
+              </a:rPr>
+              <a:t>)</a:t>
             </a:r>
           </a:p>
         </p:txBody>
@@ -7218,8 +7240,8 @@
         </p:nvSpPr>
         <p:spPr>
           <a:xfrm>
-            <a:off x="4389120" y="2057400"/>
-            <a:ext cx="3291840" cy="1092607"/>
+            <a:off x="4206240" y="2009874"/>
+            <a:ext cx="3291840" cy="1692771"/>
           </a:xfrm>
           <a:prstGeom prst="rect">
             <a:avLst/>
@@ -7296,11 +7318,77 @@
               </a:rPr>
               <a:t>objects</a:t>
             </a:r>
-            <a:endParaRPr lang="de-CH" sz="1300" b="0" dirty="0">
+            <a:r>
+              <a:rPr lang="de-CH" sz="1300" b="0" dirty="0">
+                <a:solidFill>
+                  <a:srgbClr val="E0E0E0"/>
+                </a:solidFill>
+              </a:rPr>
+              <a:t> </a:t>
+            </a:r>
+            <a:endParaRPr lang="de-CH" sz="1300" dirty="0">
               <a:solidFill>
                 <a:srgbClr val="E0E0E0"/>
               </a:solidFill>
             </a:endParaRPr>
+          </a:p>
+          <a:p>
+            <a:r>
+              <a:rPr lang="de-CH" sz="1300" b="0" dirty="0">
+                <a:solidFill>
+                  <a:srgbClr val="E0E0E0"/>
+                </a:solidFill>
+              </a:rPr>
+              <a:t>(</a:t>
+            </a:r>
+            <a:r>
+              <a:rPr lang="de-CH" sz="1300" b="0" dirty="0" err="1">
+                <a:solidFill>
+                  <a:srgbClr val="E0E0E0"/>
+                </a:solidFill>
+              </a:rPr>
+              <a:t>access</a:t>
+            </a:r>
+            <a:r>
+              <a:rPr lang="de-CH" sz="1300" b="0" dirty="0">
+                <a:solidFill>
+                  <a:srgbClr val="E0E0E0"/>
+                </a:solidFill>
+              </a:rPr>
+              <a:t> </a:t>
+            </a:r>
+            <a:r>
+              <a:rPr lang="de-CH" sz="1300" b="0" dirty="0" err="1">
+                <a:solidFill>
+                  <a:srgbClr val="E0E0E0"/>
+                </a:solidFill>
+              </a:rPr>
+              <a:t>by</a:t>
+            </a:r>
+            <a:r>
+              <a:rPr lang="de-CH" sz="1300" b="0" dirty="0">
+                <a:solidFill>
+                  <a:srgbClr val="E0E0E0"/>
+                </a:solidFill>
+              </a:rPr>
+              <a:t> </a:t>
+            </a:r>
+            <a:r>
+              <a:rPr lang="de-CH" sz="1300" b="0" dirty="0" err="1">
+                <a:solidFill>
+                  <a:srgbClr val="E0E0E0"/>
+                </a:solidFill>
+              </a:rPr>
+              <a:t>pymongo</a:t>
+            </a:r>
+            <a:r>
+              <a:rPr lang="de-CH" sz="1300" b="0" dirty="0">
+                <a:solidFill>
+                  <a:srgbClr val="E0E0E0"/>
+                </a:solidFill>
+              </a:rPr>
+              <a:t>)</a:t>
+            </a:r>
           </a:p>
           <a:p>
             <a:pPr algn="l"/>
@@ -7313,59 +7401,65 @@
           <a:p>
             <a:pPr algn="l"/>
             <a:r>
-              <a:rPr sz="1300" b="0" dirty="0">
+              <a:rPr lang="en-US" sz="1300" b="0" dirty="0">
                 <a:solidFill>
                   <a:srgbClr val="E0E0E0"/>
                 </a:solidFill>
               </a:rPr>
-              <a:t>• </a:t>
-            </a:r>
-            <a:r>
-              <a:rPr lang="de-CH" sz="1300" b="0" dirty="0" err="1">
+              <a:t>• Silver-Layer: </a:t>
+            </a:r>
+            <a:r>
+              <a:rPr lang="en-US" sz="1300" b="0" dirty="0" err="1">
                 <a:solidFill>
                   <a:srgbClr val="E0E0E0"/>
                 </a:solidFill>
               </a:rPr>
-              <a:t>Silver</a:t>
-            </a:r>
-            <a:r>
-              <a:rPr lang="de-CH" sz="1300" b="0" dirty="0">
+              <a:t>MinIO</a:t>
+            </a:r>
+            <a:r>
+              <a:rPr lang="en-US" sz="1300" b="0" dirty="0">
                 <a:solidFill>
                   <a:srgbClr val="E0E0E0"/>
                 </a:solidFill>
               </a:rPr>
-              <a:t>-Layer: </a:t>
-            </a:r>
-            <a:r>
-              <a:rPr sz="1300" b="0" dirty="0" err="1">
-                <a:solidFill>
-                  <a:srgbClr val="E0E0E0"/>
-                </a:solidFill>
-              </a:rPr>
-              <a:t>MinIO</a:t>
-            </a:r>
-            <a:r>
-              <a:rPr sz="1300" b="0" dirty="0">
-                <a:solidFill>
-                  <a:srgbClr val="E0E0E0"/>
-                </a:solidFill>
-              </a:rPr>
-              <a:t> — S3-compatible storage</a:t>
-            </a:r>
-            <a:r>
-              <a:rPr lang="de-CH" sz="1300" b="0" dirty="0">
-                <a:solidFill>
-                  <a:srgbClr val="E0E0E0"/>
-                </a:solidFill>
-              </a:rPr>
-              <a:t> (Parquet)</a:t>
-            </a:r>
-            <a:endParaRPr sz="1300" b="0" dirty="0">
+              <a:t> — S3-compatible storage, parquet data</a:t>
+            </a:r>
+          </a:p>
+          <a:p>
+            <a:pPr algn="l"/>
+            <a:endParaRPr lang="en-US" sz="1300" dirty="0">
               <a:solidFill>
                 <a:srgbClr val="E0E0E0"/>
               </a:solidFill>
             </a:endParaRPr>
           </a:p>
+          <a:p>
+            <a:pPr algn="l"/>
+            <a:r>
+              <a:rPr lang="en-US" sz="1300" b="0" dirty="0">
+                <a:solidFill>
+                  <a:srgbClr val="E0E0E0"/>
+                </a:solidFill>
+              </a:rPr>
+              <a:t>(access by </a:t>
+            </a:r>
+            <a:r>
+              <a:rPr lang="en-US" sz="1300" b="0" dirty="0" err="1">
+                <a:solidFill>
+                  <a:srgbClr val="E0E0E0"/>
+                </a:solidFill>
+              </a:rPr>
+              <a:t>pyarrow</a:t>
+            </a:r>
+            <a:r>
+              <a:rPr lang="en-US" sz="1300" b="0" dirty="0">
+                <a:solidFill>
+                  <a:srgbClr val="E0E0E0"/>
+                </a:solidFill>
+              </a:rPr>
+              <a:t>)</a:t>
+            </a:r>
+          </a:p>
         </p:txBody>
       </p:sp>
       <p:sp>
@@ -7376,8 +7470,8 @@
         </p:nvSpPr>
         <p:spPr>
           <a:xfrm>
-            <a:off x="4389120" y="3260057"/>
-            <a:ext cx="3291840" cy="484632"/>
+            <a:off x="4434840" y="288366"/>
+            <a:ext cx="3291840" cy="292388"/>
           </a:xfrm>
           <a:prstGeom prst="rect">
             <a:avLst/>
@@ -7391,6 +7485,14 @@
           <a:lstStyle/>
           <a:p>
             <a:pPr algn="l"/>
+            <a:r>
+              <a:rPr lang="de-CH" sz="1300" b="0" dirty="0">
+                <a:solidFill>
+                  <a:srgbClr val="E0E0E0"/>
+                </a:solidFill>
+              </a:rPr>
+              <a:t>      </a:t>
+            </a:r>
             <a:r>
               <a:rPr sz="1300" b="0" dirty="0">
                 <a:solidFill>
@@ -7594,40 +7696,6 @@
       </p:sp>
       <p:sp>
         <p:nvSpPr>
-          <p:cNvPr id="24" name="TextBox 23"/>
-          <p:cNvSpPr txBox="1"/>
-          <p:nvPr/>
-        </p:nvSpPr>
-        <p:spPr>
-          <a:xfrm>
-            <a:off x="8321040" y="3099816"/>
-            <a:ext cx="3291840" cy="484632"/>
-          </a:xfrm>
-          <a:prstGeom prst="rect">
-            <a:avLst/>
-          </a:prstGeom>
-          <a:noFill/>
-        </p:spPr>
-        <p:txBody>
-          <a:bodyPr wrap="square">
-            <a:spAutoFit/>
-          </a:bodyPr>
-          <a:lstStyle/>
-          <a:p>
-            <a:pPr algn="l"/>
-            <a:r>
-              <a:rPr sz="1300" b="0">
-                <a:solidFill>
-                  <a:srgbClr val="E0E0E0"/>
-                </a:solidFill>
-              </a:rPr>
-              <a:t>• PyArrow + pandas for Parquet I/O</a:t>
-            </a:r>
-          </a:p>
-        </p:txBody>
-      </p:sp>
-      <p:sp>
-        <p:nvSpPr>
           <p:cNvPr id="25" name="Rectangle 24"/>
           <p:cNvSpPr/>
           <p:nvPr/>
@@ -7796,12 +7864,36 @@
           <a:p>
             <a:pPr algn="l"/>
             <a:r>
+              <a:rPr lang="de-CH" sz="1300" dirty="0">
+                <a:solidFill>
+                  <a:srgbClr val="E0E0E0"/>
+                </a:solidFill>
+              </a:rPr>
+              <a:t>(</a:t>
+            </a:r>
+            <a:r>
+              <a:rPr lang="de-CH" sz="1300" dirty="0" err="1">
+                <a:solidFill>
+                  <a:srgbClr val="E0E0E0"/>
+                </a:solidFill>
+              </a:rPr>
+              <a:t>a</a:t>
+            </a:r>
+            <a:r>
+              <a:rPr lang="de-CH" sz="1300" b="0" dirty="0" err="1">
+                <a:solidFill>
+                  <a:srgbClr val="E0E0E0"/>
+                </a:solidFill>
+              </a:rPr>
+              <a:t>ccess</a:t>
+            </a:r>
+            <a:r>
               <a:rPr lang="de-CH" sz="1300" b="0" dirty="0">
                 <a:solidFill>
                   <a:srgbClr val="E0E0E0"/>
                 </a:solidFill>
               </a:rPr>
-              <a:t>• Access </a:t>
+              <a:t> </a:t>
             </a:r>
             <a:r>
               <a:rPr lang="de-CH" sz="1300" b="0" dirty="0" err="1">
@@ -7812,13 +7904,18 @@
               <a:t>with</a:t>
             </a:r>
             <a:r>
-              <a:rPr lang="de-CH" sz="1300" b="0" dirty="0">
+              <a:rPr lang="de-CH" sz="1300" b="0">
                 <a:solidFill>
                   <a:srgbClr val="E0E0E0"/>
                 </a:solidFill>
               </a:rPr>
-              <a:t> psycopg2-binary</a:t>
-            </a:r>
+              <a:t> psycopg2-binary)</a:t>
+            </a:r>
+            <a:endParaRPr lang="de-CH" sz="1300" b="0" dirty="0">
+              <a:solidFill>
+                <a:srgbClr val="E0E0E0"/>
+              </a:solidFill>
+            </a:endParaRPr>
           </a:p>
         </p:txBody>
       </p:sp>
@@ -7953,7 +8050,7 @@
         <p:spPr>
           <a:xfrm>
             <a:off x="4389120" y="4663440"/>
-            <a:ext cx="3291840" cy="484632"/>
+            <a:ext cx="3291840" cy="292388"/>
           </a:xfrm>
           <a:prstGeom prst="rect">
             <a:avLst/>
@@ -7968,13 +8065,26 @@
           <a:p>
             <a:pPr algn="l"/>
             <a:r>
-              <a:rPr sz="1300" b="0">
+              <a:rPr sz="1300" b="0" dirty="0">
                 <a:solidFill>
                   <a:srgbClr val="E0E0E0"/>
                 </a:solidFill>
               </a:rPr>
-              <a:t>• Streamlit 1.35</a:t>
-            </a:r>
+              <a:t>• </a:t>
+            </a:r>
+            <a:r>
+              <a:rPr sz="1300" b="0" dirty="0" err="1">
+                <a:solidFill>
+                  <a:srgbClr val="E0E0E0"/>
+                </a:solidFill>
+              </a:rPr>
+              <a:t>Streamlit</a:t>
+            </a:r>
+            <a:endParaRPr sz="1300" b="0" dirty="0">
+              <a:solidFill>
+                <a:srgbClr val="E0E0E0"/>
+              </a:solidFill>
+            </a:endParaRPr>
           </a:p>
         </p:txBody>
       </p:sp>
@@ -8064,40 +8174,6 @@
                 </a:solidFill>
               </a:rPr>
               <a:t> maps)</a:t>
-            </a:r>
-          </a:p>
-        </p:txBody>
-      </p:sp>
-      <p:sp>
-        <p:nvSpPr>
-          <p:cNvPr id="36" name="TextBox 35"/>
-          <p:cNvSpPr txBox="1"/>
-          <p:nvPr/>
-        </p:nvSpPr>
-        <p:spPr>
-          <a:xfrm>
-            <a:off x="4389120" y="5705856"/>
-            <a:ext cx="3291840" cy="292388"/>
-          </a:xfrm>
-          <a:prstGeom prst="rect">
-            <a:avLst/>
-          </a:prstGeom>
-          <a:noFill/>
-        </p:spPr>
-        <p:txBody>
-          <a:bodyPr wrap="square">
-            <a:spAutoFit/>
-          </a:bodyPr>
-          <a:lstStyle/>
-          <a:p>
-            <a:pPr algn="l"/>
-            <a:r>
-              <a:rPr sz="1300" b="0" dirty="0">
-                <a:solidFill>
-                  <a:srgbClr val="E0E0E0"/>
-                </a:solidFill>
-              </a:rPr>
-              <a:t>• pandas</a:t>
             </a:r>
           </a:p>
         </p:txBody>

--- a/_documentation/Earthquake_Monitor_Presentation.pptx
+++ b/_documentation/Earthquake_Monitor_Presentation.pptx
@@ -6592,7 +6592,7 @@
         <p:spPr>
           <a:xfrm>
             <a:off x="70196" y="100377"/>
-            <a:ext cx="3241804" cy="1015663"/>
+            <a:ext cx="3241804" cy="584775"/>
           </a:xfrm>
           <a:prstGeom prst="rect">
             <a:avLst/>
@@ -6605,14 +6605,14 @@
           </a:bodyPr>
           <a:lstStyle/>
           <a:p>
-            <a:pPr algn="l"/>
+            <a:pPr algn="ctr"/>
             <a:r>
               <a:rPr lang="de-CH" sz="2800" b="1" dirty="0">
                 <a:solidFill>
                   <a:srgbClr val="FFFFFF"/>
                 </a:solidFill>
               </a:rPr>
-              <a:t>Software</a:t>
+              <a:t>Project</a:t>
             </a:r>
             <a:r>
               <a:rPr lang="de-CH" sz="3200" b="1" dirty="0">
@@ -6623,12 +6623,12 @@
               <a:t> </a:t>
             </a:r>
             <a:r>
-              <a:rPr lang="de-CH" sz="2800" b="1" dirty="0">
+              <a:rPr lang="de-CH" sz="2800" b="1" dirty="0" err="1">
                 <a:solidFill>
                   <a:srgbClr val="FFFFFF"/>
                 </a:solidFill>
               </a:rPr>
-              <a:t>Architecture</a:t>
+              <a:t>Structure</a:t>
             </a:r>
             <a:endParaRPr sz="2800" b="1" dirty="0">
               <a:solidFill>
@@ -7457,49 +7457,7 @@
                   <a:srgbClr val="E0E0E0"/>
                 </a:solidFill>
               </a:rPr>
-              <a:t>)</a:t>
-            </a:r>
-          </a:p>
-        </p:txBody>
-      </p:sp>
-      <p:sp>
-        <p:nvSpPr>
-          <p:cNvPr id="18" name="TextBox 17"/>
-          <p:cNvSpPr txBox="1"/>
-          <p:nvPr/>
-        </p:nvSpPr>
-        <p:spPr>
-          <a:xfrm>
-            <a:off x="4434840" y="288366"/>
-            <a:ext cx="3291840" cy="292388"/>
-          </a:xfrm>
-          <a:prstGeom prst="rect">
-            <a:avLst/>
-          </a:prstGeom>
-          <a:noFill/>
-        </p:spPr>
-        <p:txBody>
-          <a:bodyPr wrap="square">
-            <a:spAutoFit/>
-          </a:bodyPr>
-          <a:lstStyle/>
-          <a:p>
-            <a:pPr algn="l"/>
-            <a:r>
-              <a:rPr lang="de-CH" sz="1300" b="0" dirty="0">
-                <a:solidFill>
-                  <a:srgbClr val="E0E0E0"/>
-                </a:solidFill>
-              </a:rPr>
-              <a:t>      </a:t>
-            </a:r>
-            <a:r>
-              <a:rPr sz="1300" b="0" dirty="0">
-                <a:solidFill>
-                  <a:srgbClr val="E0E0E0"/>
-                </a:solidFill>
-              </a:rPr>
-              <a:t>• Accessed via boto3 / AWS SDK</a:t>
+              <a:t>, boto3)</a:t>
             </a:r>
           </a:p>
         </p:txBody>
@@ -8309,7 +8267,7 @@
         <p:spPr>
           <a:xfrm>
             <a:off x="8321040" y="4663440"/>
-            <a:ext cx="3291840" cy="484632"/>
+            <a:ext cx="3291840" cy="692497"/>
           </a:xfrm>
           <a:prstGeom prst="rect">
             <a:avLst/>
@@ -8324,13 +8282,81 @@
           <a:p>
             <a:pPr algn="l"/>
             <a:r>
-              <a:rPr sz="1300" b="0">
+              <a:rPr sz="1300" b="0" dirty="0">
                 <a:solidFill>
                   <a:srgbClr val="E0E0E0"/>
                 </a:solidFill>
               </a:rPr>
               <a:t>• Docker &amp; Docker Compose</a:t>
             </a:r>
+            <a:endParaRPr lang="de-CH" sz="1300" b="0" dirty="0">
+              <a:solidFill>
+                <a:srgbClr val="E0E0E0"/>
+              </a:solidFill>
+            </a:endParaRPr>
+          </a:p>
+          <a:p>
+            <a:pPr algn="l"/>
+            <a:endParaRPr lang="de-CH" sz="1300" b="0" dirty="0">
+              <a:solidFill>
+                <a:srgbClr val="E0E0E0"/>
+              </a:solidFill>
+            </a:endParaRPr>
+          </a:p>
+          <a:p>
+            <a:r>
+              <a:rPr lang="de-CH" sz="1300" b="0" dirty="0">
+                <a:solidFill>
+                  <a:srgbClr val="E0E0E0"/>
+                </a:solidFill>
+              </a:rPr>
+              <a:t>• </a:t>
+            </a:r>
+            <a:r>
+              <a:rPr lang="de-CH" sz="1300" b="0" dirty="0" err="1">
+                <a:solidFill>
+                  <a:srgbClr val="E0E0E0"/>
+                </a:solidFill>
+              </a:rPr>
+              <a:t>local</a:t>
+            </a:r>
+            <a:r>
+              <a:rPr lang="de-CH" sz="1300" b="0" dirty="0">
+                <a:solidFill>
+                  <a:srgbClr val="E0E0E0"/>
+                </a:solidFill>
+              </a:rPr>
+              <a:t> </a:t>
+            </a:r>
+            <a:r>
+              <a:rPr lang="de-CH" sz="1300" b="0" dirty="0" err="1">
+                <a:solidFill>
+                  <a:srgbClr val="E0E0E0"/>
+                </a:solidFill>
+              </a:rPr>
+              <a:t>running</a:t>
+            </a:r>
+            <a:r>
+              <a:rPr lang="de-CH" sz="1300" b="0" dirty="0">
+                <a:solidFill>
+                  <a:srgbClr val="E0E0E0"/>
+                </a:solidFill>
+              </a:rPr>
+              <a:t> </a:t>
+            </a:r>
+            <a:r>
+              <a:rPr lang="de-CH" sz="1300" b="0" dirty="0" err="1">
+                <a:solidFill>
+                  <a:srgbClr val="E0E0E0"/>
+                </a:solidFill>
+              </a:rPr>
+              <a:t>containers</a:t>
+            </a:r>
+            <a:endParaRPr lang="de-CH" sz="1300" b="0" dirty="0">
+              <a:solidFill>
+                <a:srgbClr val="E0E0E0"/>
+              </a:solidFill>
+            </a:endParaRPr>
           </a:p>
         </p:txBody>
       </p:sp>
@@ -9662,7 +9688,7 @@
         <p:spPr>
           <a:xfrm>
             <a:off x="377826" y="3259723"/>
-            <a:ext cx="11430000" cy="584775"/>
+            <a:ext cx="11430000" cy="1077218"/>
           </a:xfrm>
           <a:prstGeom prst="rect">
             <a:avLst/>
@@ -9741,13 +9767,142 @@
               <a:t>• </a:t>
             </a:r>
             <a:r>
+              <a:rPr lang="de-CH" sz="1600" b="0" dirty="0" err="1">
+                <a:solidFill>
+                  <a:srgbClr val="E0E0E0"/>
+                </a:solidFill>
+              </a:rPr>
+              <a:t>risk</a:t>
+            </a:r>
+            <a:r>
+              <a:rPr lang="de-CH" sz="1600" b="0" dirty="0">
+                <a:solidFill>
+                  <a:srgbClr val="E0E0E0"/>
+                </a:solidFill>
+              </a:rPr>
+              <a:t> </a:t>
+            </a:r>
+            <a:r>
+              <a:rPr lang="de-CH" sz="1600" b="0" dirty="0" err="1">
+                <a:solidFill>
+                  <a:srgbClr val="E0E0E0"/>
+                </a:solidFill>
+              </a:rPr>
+              <a:t>calculation</a:t>
+            </a:r>
+            <a:r>
+              <a:rPr lang="de-CH" sz="1600" b="0" dirty="0">
+                <a:solidFill>
+                  <a:srgbClr val="E0E0E0"/>
+                </a:solidFill>
+              </a:rPr>
+              <a:t> (via </a:t>
+            </a:r>
+            <a:r>
+              <a:rPr lang="de-CH" sz="1600" b="0" dirty="0" err="1">
+                <a:solidFill>
+                  <a:srgbClr val="E0E0E0"/>
+                </a:solidFill>
+              </a:rPr>
+              <a:t>information</a:t>
+            </a:r>
+            <a:r>
+              <a:rPr lang="de-CH" sz="1600" b="0" dirty="0">
+                <a:solidFill>
+                  <a:srgbClr val="E0E0E0"/>
+                </a:solidFill>
+              </a:rPr>
+              <a:t> </a:t>
+            </a:r>
+            <a:r>
+              <a:rPr lang="de-CH" sz="1600" b="0" dirty="0" err="1">
+                <a:solidFill>
+                  <a:srgbClr val="E0E0E0"/>
+                </a:solidFill>
+              </a:rPr>
+              <a:t>about</a:t>
+            </a:r>
+            <a:r>
+              <a:rPr lang="de-CH" sz="1600" b="0" dirty="0">
+                <a:solidFill>
+                  <a:srgbClr val="E0E0E0"/>
+                </a:solidFill>
+              </a:rPr>
+              <a:t> </a:t>
+            </a:r>
+            <a:r>
+              <a:rPr lang="de-CH" sz="1600" b="0" dirty="0" err="1">
+                <a:solidFill>
+                  <a:srgbClr val="E0E0E0"/>
+                </a:solidFill>
+              </a:rPr>
+              <a:t>soil</a:t>
+            </a:r>
+            <a:r>
+              <a:rPr lang="de-CH" sz="1600" b="0" dirty="0">
+                <a:solidFill>
+                  <a:srgbClr val="E0E0E0"/>
+                </a:solidFill>
+              </a:rPr>
+              <a:t> </a:t>
+            </a:r>
+            <a:r>
+              <a:rPr lang="de-CH" sz="1600" b="0" dirty="0" err="1">
+                <a:solidFill>
+                  <a:srgbClr val="E0E0E0"/>
+                </a:solidFill>
+              </a:rPr>
+              <a:t>layer</a:t>
+            </a:r>
+            <a:r>
+              <a:rPr lang="de-CH" sz="1600" b="0" dirty="0">
+                <a:solidFill>
+                  <a:srgbClr val="E0E0E0"/>
+                </a:solidFill>
+              </a:rPr>
+              <a:t> </a:t>
+            </a:r>
+            <a:r>
+              <a:rPr lang="de-CH" sz="1600" b="0" dirty="0" err="1">
+                <a:solidFill>
+                  <a:srgbClr val="E0E0E0"/>
+                </a:solidFill>
+              </a:rPr>
+              <a:t>property</a:t>
+            </a:r>
+            <a:r>
+              <a:rPr lang="de-CH" sz="1600" b="0" dirty="0">
+                <a:solidFill>
+                  <a:srgbClr val="E0E0E0"/>
+                </a:solidFill>
+              </a:rPr>
+              <a:t>)</a:t>
+            </a:r>
+            <a:endParaRPr lang="de-CH" sz="1600" dirty="0">
+              <a:solidFill>
+                <a:srgbClr val="BFBFBF"/>
+              </a:solidFill>
+              <a:latin typeface="-apple-system"/>
+            </a:endParaRPr>
+          </a:p>
+          <a:p>
+            <a:pPr algn="ctr"/>
+            <a:r>
+              <a:rPr lang="de-CH" sz="1600" b="0" dirty="0">
+                <a:solidFill>
+                  <a:srgbClr val="E0E0E0"/>
+                </a:solidFill>
+              </a:rPr>
+              <a:t>• </a:t>
+            </a:r>
+            <a:r>
               <a:rPr lang="de-CH" sz="1600" dirty="0">
                 <a:solidFill>
                   <a:srgbClr val="BFBFBF"/>
                 </a:solidFill>
                 <a:latin typeface="-apple-system"/>
               </a:rPr>
-              <a:t>Time-</a:t>
+              <a:t>after-shock </a:t>
             </a:r>
             <a:r>
               <a:rPr lang="de-CH" sz="1600" dirty="0" err="1">
@@ -9756,79 +9911,69 @@
                 </a:solidFill>
                 <a:latin typeface="-apple-system"/>
               </a:rPr>
-              <a:t>consuming</a:t>
-            </a:r>
-            <a:r>
-              <a:rPr lang="de-CH" sz="1600" dirty="0">
+              <a:t>monitoring</a:t>
+            </a:r>
+            <a:endParaRPr lang="de-CH" sz="1600" dirty="0">
+              <a:solidFill>
+                <a:srgbClr val="BFBFBF"/>
+              </a:solidFill>
+              <a:latin typeface="-apple-system"/>
+            </a:endParaRPr>
+          </a:p>
+          <a:p>
+            <a:pPr algn="ctr"/>
+            <a:r>
+              <a:rPr lang="de-CH" sz="1600" b="0" dirty="0">
+                <a:solidFill>
+                  <a:srgbClr val="E0E0E0"/>
+                </a:solidFill>
+              </a:rPr>
+              <a:t>• </a:t>
+            </a:r>
+            <a:r>
+              <a:rPr lang="de-CH" sz="1600" b="0" dirty="0" err="1">
                 <a:solidFill>
                   <a:srgbClr val="BFBFBF"/>
                 </a:solidFill>
                 <a:latin typeface="-apple-system"/>
               </a:rPr>
+              <a:t>daily</a:t>
+            </a:r>
+            <a:r>
+              <a:rPr lang="de-CH" sz="1600" b="0" dirty="0">
+                <a:solidFill>
+                  <a:srgbClr val="BFBFBF"/>
+                </a:solidFill>
+                <a:latin typeface="-apple-system"/>
+              </a:rPr>
               <a:t> </a:t>
             </a:r>
             <a:r>
-              <a:rPr lang="de-CH" sz="1600" dirty="0" err="1">
+              <a:rPr lang="de-CH" sz="1600" b="0" dirty="0" err="1">
                 <a:solidFill>
                   <a:srgbClr val="BFBFBF"/>
                 </a:solidFill>
                 <a:latin typeface="-apple-system"/>
               </a:rPr>
+              <a:t>report</a:t>
+            </a:r>
+            <a:r>
+              <a:rPr lang="de-CH" sz="1600" b="0" dirty="0">
+                <a:solidFill>
+                  <a:srgbClr val="BFBFBF"/>
+                </a:solidFill>
+                <a:latin typeface="-apple-system"/>
+              </a:rPr>
+              <a:t> </a:t>
+            </a:r>
+            <a:r>
+              <a:rPr lang="de-CH" sz="1600" b="0" dirty="0" err="1">
+                <a:solidFill>
+                  <a:srgbClr val="BFBFBF"/>
+                </a:solidFill>
+                <a:latin typeface="-apple-system"/>
+              </a:rPr>
               <a:t>generation</a:t>
-            </a:r>
-            <a:r>
-              <a:rPr lang="de-CH" sz="1600" dirty="0">
-                <a:solidFill>
-                  <a:srgbClr val="BFBFBF"/>
-                </a:solidFill>
-                <a:latin typeface="-apple-system"/>
-              </a:rPr>
-              <a:t> </a:t>
-            </a:r>
-            <a:r>
-              <a:rPr lang="de-CH" sz="1600" dirty="0" err="1">
-                <a:solidFill>
-                  <a:srgbClr val="BFBFBF"/>
-                </a:solidFill>
-                <a:latin typeface="-apple-system"/>
-              </a:rPr>
-              <a:t>of</a:t>
-            </a:r>
-            <a:r>
-              <a:rPr lang="de-CH" sz="1600" dirty="0">
-                <a:solidFill>
-                  <a:srgbClr val="BFBFBF"/>
-                </a:solidFill>
-                <a:latin typeface="-apple-system"/>
-              </a:rPr>
-              <a:t> </a:t>
-            </a:r>
-            <a:r>
-              <a:rPr lang="de-CH" sz="1600" dirty="0" err="1">
-                <a:solidFill>
-                  <a:srgbClr val="BFBFBF"/>
-                </a:solidFill>
-                <a:latin typeface="-apple-system"/>
-              </a:rPr>
-              <a:t>reports</a:t>
-            </a:r>
-            <a:r>
-              <a:rPr lang="de-CH" sz="1600" dirty="0">
-                <a:solidFill>
-                  <a:srgbClr val="BFBFBF"/>
-                </a:solidFill>
-                <a:latin typeface="-apple-system"/>
-              </a:rPr>
-              <a:t> via </a:t>
-            </a:r>
-            <a:r>
-              <a:rPr lang="de-CH" sz="1600" dirty="0" err="1">
-                <a:solidFill>
-                  <a:srgbClr val="BFBFBF"/>
-                </a:solidFill>
-                <a:latin typeface="-apple-system"/>
-              </a:rPr>
-              <a:t>jobs</a:t>
             </a:r>
             <a:endParaRPr sz="1600" b="0" dirty="0">
               <a:solidFill>
